--- a/Reporte 010926.pptx
+++ b/Reporte 010926.pptx
@@ -6566,10 +6566,10 @@
       </p:sp>
       <p:pic>
         <p:nvPicPr>
-          <p:cNvPr id="4" name="Imagen 3">
+          <p:cNvPr id="5" name="Imagen 4">
             <a:extLst>
               <a:ext uri="{FF2B5EF4-FFF2-40B4-BE49-F238E27FC236}">
-                <a16:creationId xmlns:a16="http://schemas.microsoft.com/office/drawing/2014/main" id="{CA422537-266F-A216-56BC-273BE8A0C044}"/>
+                <a16:creationId xmlns:a16="http://schemas.microsoft.com/office/drawing/2014/main" id="{0E1D9F03-BC78-F598-7AD3-F655A08799C6}"/>
               </a:ext>
             </a:extLst>
           </p:cNvPr>
@@ -6586,8 +6586,8 @@
         </p:blipFill>
         <p:spPr>
           <a:xfrm>
-            <a:off x="0" y="886930"/>
-            <a:ext cx="9144000" cy="3369640"/>
+            <a:off x="0" y="886459"/>
+            <a:ext cx="9144000" cy="3513458"/>
           </a:xfrm>
           <a:prstGeom prst="rect">
             <a:avLst/>
@@ -6672,10 +6672,10 @@
       </p:sp>
       <p:pic>
         <p:nvPicPr>
-          <p:cNvPr id="3" name="Imagen 2">
+          <p:cNvPr id="4" name="Imagen 3">
             <a:extLst>
               <a:ext uri="{FF2B5EF4-FFF2-40B4-BE49-F238E27FC236}">
-                <a16:creationId xmlns:a16="http://schemas.microsoft.com/office/drawing/2014/main" id="{959C365E-3D13-B494-96C2-7F4C7209DAB0}"/>
+                <a16:creationId xmlns:a16="http://schemas.microsoft.com/office/drawing/2014/main" id="{3F3BAC27-FF07-F9A2-EFB3-5EBFADAC87DA}"/>
               </a:ext>
             </a:extLst>
           </p:cNvPr>
@@ -6692,8 +6692,8 @@
         </p:blipFill>
         <p:spPr>
           <a:xfrm>
-            <a:off x="0" y="1327504"/>
-            <a:ext cx="9144000" cy="2631367"/>
+            <a:off x="-6725" y="1342315"/>
+            <a:ext cx="9144000" cy="2601746"/>
           </a:xfrm>
           <a:prstGeom prst="rect">
             <a:avLst/>
@@ -6778,10 +6778,10 @@
       </p:sp>
       <p:pic>
         <p:nvPicPr>
-          <p:cNvPr id="5" name="Imagen 4">
+          <p:cNvPr id="4" name="Imagen 3">
             <a:extLst>
               <a:ext uri="{FF2B5EF4-FFF2-40B4-BE49-F238E27FC236}">
-                <a16:creationId xmlns:a16="http://schemas.microsoft.com/office/drawing/2014/main" id="{D2847094-423A-07F8-36E2-A8E7F073727E}"/>
+                <a16:creationId xmlns:a16="http://schemas.microsoft.com/office/drawing/2014/main" id="{94291237-6107-6FFB-5795-D57B7680F0E4}"/>
               </a:ext>
             </a:extLst>
           </p:cNvPr>
@@ -6798,8 +6798,8 @@
         </p:blipFill>
         <p:spPr>
           <a:xfrm>
-            <a:off x="-6725" y="695176"/>
-            <a:ext cx="9144000" cy="3896024"/>
+            <a:off x="-6725" y="713082"/>
+            <a:ext cx="9144000" cy="3860211"/>
           </a:xfrm>
           <a:prstGeom prst="rect">
             <a:avLst/>
@@ -6884,10 +6884,10 @@
       </p:sp>
       <p:pic>
         <p:nvPicPr>
-          <p:cNvPr id="3" name="Imagen 2">
+          <p:cNvPr id="4" name="Imagen 3">
             <a:extLst>
               <a:ext uri="{FF2B5EF4-FFF2-40B4-BE49-F238E27FC236}">
-                <a16:creationId xmlns:a16="http://schemas.microsoft.com/office/drawing/2014/main" id="{03EC2CF6-270F-9EDD-E72E-2F9794ADF509}"/>
+                <a16:creationId xmlns:a16="http://schemas.microsoft.com/office/drawing/2014/main" id="{564EEA69-8E7A-0BC9-8B82-78E9252FCCE6}"/>
               </a:ext>
             </a:extLst>
           </p:cNvPr>
@@ -6904,8 +6904,8 @@
         </p:blipFill>
         <p:spPr>
           <a:xfrm>
-            <a:off x="-6725" y="1298184"/>
-            <a:ext cx="9144000" cy="2690008"/>
+            <a:off x="0" y="1201156"/>
+            <a:ext cx="9144000" cy="2741188"/>
           </a:xfrm>
           <a:prstGeom prst="rect">
             <a:avLst/>
@@ -6990,10 +6990,10 @@
       </p:sp>
       <p:pic>
         <p:nvPicPr>
-          <p:cNvPr id="3" name="Imagen 2">
+          <p:cNvPr id="4" name="Imagen 3">
             <a:extLst>
               <a:ext uri="{FF2B5EF4-FFF2-40B4-BE49-F238E27FC236}">
-                <a16:creationId xmlns:a16="http://schemas.microsoft.com/office/drawing/2014/main" id="{CD9E026B-7303-1D02-7E55-B3856A5F369D}"/>
+                <a16:creationId xmlns:a16="http://schemas.microsoft.com/office/drawing/2014/main" id="{48D8438B-CCEA-0E4C-EBB7-52BF7F507E73}"/>
               </a:ext>
             </a:extLst>
           </p:cNvPr>
@@ -7010,8 +7010,8 @@
         </p:blipFill>
         <p:spPr>
           <a:xfrm>
-            <a:off x="0" y="523796"/>
-            <a:ext cx="9144000" cy="4095908"/>
+            <a:off x="0" y="1569652"/>
+            <a:ext cx="9144000" cy="2147072"/>
           </a:xfrm>
           <a:prstGeom prst="rect">
             <a:avLst/>
@@ -7102,10 +7102,10 @@
       </p:sp>
       <p:pic>
         <p:nvPicPr>
-          <p:cNvPr id="4" name="Imagen 3">
+          <p:cNvPr id="3" name="Imagen 2">
             <a:extLst>
               <a:ext uri="{FF2B5EF4-FFF2-40B4-BE49-F238E27FC236}">
-                <a16:creationId xmlns:a16="http://schemas.microsoft.com/office/drawing/2014/main" id="{A7D2585A-269D-53C4-5E16-19DA5DE550B0}"/>
+                <a16:creationId xmlns:a16="http://schemas.microsoft.com/office/drawing/2014/main" id="{7670B953-0E9F-37B9-200D-A596BE2FAE34}"/>
               </a:ext>
             </a:extLst>
           </p:cNvPr>
@@ -7122,8 +7122,8 @@
         </p:blipFill>
         <p:spPr>
           <a:xfrm>
-            <a:off x="0" y="1309269"/>
-            <a:ext cx="9144000" cy="2667837"/>
+            <a:off x="0" y="376143"/>
+            <a:ext cx="9144000" cy="4534090"/>
           </a:xfrm>
           <a:prstGeom prst="rect">
             <a:avLst/>
